--- a/assets/pptx/catalog-288.pptx
+++ b/assets/pptx/catalog-288.pptx
@@ -3245,7 +3245,7 @@
                 <a:ea typeface="Ebrima"/>
                 <a:cs typeface="Ebrima"/>
               </a:rPr>
-              <a:t>የክብሬን ቤት አከብራለሁ (2x)</a:t>
+              <a:t>የክብሬን ቤት አከብራለሁ 2x</a:t>
             </a:r>
           </a:p>
           <a:p>
@@ -3281,7 +3281,7 @@
                 <a:ea typeface="Ebrima"/>
                 <a:cs typeface="Ebrima"/>
               </a:rPr>
-              <a:t>የክብሬን ቤት አከብራለሁ (3x)</a:t>
+              <a:t>የክብሬን ቤት አከብራለሁ 3x</a:t>
             </a:r>
           </a:p>
         </p:txBody>
@@ -3469,7 +3469,7 @@
                 <a:ea typeface="Ebrima"/>
                 <a:cs typeface="Ebrima"/>
               </a:rPr>
-              <a:t>የክብሬን ቤት አከብራለሁ (2x)</a:t>
+              <a:t>የክብሬን ቤት አከብራለሁ 2x</a:t>
             </a:r>
           </a:p>
           <a:p>
@@ -3505,7 +3505,7 @@
                 <a:ea typeface="Ebrima"/>
                 <a:cs typeface="Ebrima"/>
               </a:rPr>
-              <a:t>የክብሬን ቤት አከብራለሁ (2x)</a:t>
+              <a:t>የክብሬን ቤት አከብራለሁ 2x</a:t>
             </a:r>
           </a:p>
         </p:txBody>
@@ -3693,7 +3693,7 @@
                 <a:ea typeface="Ebrima"/>
                 <a:cs typeface="Ebrima"/>
               </a:rPr>
-              <a:t>የክብሬን ቤት አከብራለሁ (2x)</a:t>
+              <a:t>የክብሬን ቤት አከብራለሁ 2x</a:t>
             </a:r>
           </a:p>
           <a:p>
@@ -3729,7 +3729,7 @@
                 <a:ea typeface="Ebrima"/>
                 <a:cs typeface="Ebrima"/>
               </a:rPr>
-              <a:t>የክብሬን ቤት አከብራለሁ (2x)</a:t>
+              <a:t>የክብሬን ቤት አከብራለሁ 2x</a:t>
             </a:r>
           </a:p>
         </p:txBody>
